--- a/AI_for_Operations_Course/Slides/Class_06_Warehouse_Automation.pptx
+++ b/AI_for_Operations_Course/Slides/Class_06_Warehouse_Automation.pptx
@@ -2549,6 +2549,10 @@
           </a:solidFill>
           <a:ln/>
         </p:spPr>
+        <p:txBody>
+          <a:bodyPr/>
+          <a:p/>
+        </p:txBody>
       </p:sp>
       <p:sp>
         <p:nvSpPr>
@@ -3090,6 +3094,10 @@
           </a:solidFill>
           <a:ln/>
         </p:spPr>
+        <p:txBody>
+          <a:bodyPr/>
+          <a:p/>
+        </p:txBody>
       </p:sp>
       <p:sp>
         <p:nvSpPr>
@@ -3671,6 +3679,10 @@
           </a:solidFill>
           <a:ln/>
         </p:spPr>
+        <p:txBody>
+          <a:bodyPr/>
+          <a:p/>
+        </p:txBody>
       </p:sp>
       <p:sp>
         <p:nvSpPr>
@@ -4361,6 +4373,10 @@
           </a:solidFill>
           <a:ln/>
         </p:spPr>
+        <p:txBody>
+          <a:bodyPr/>
+          <a:p/>
+        </p:txBody>
       </p:sp>
       <p:sp>
         <p:nvSpPr>
@@ -4982,6 +4998,10 @@
           </a:solidFill>
           <a:ln/>
         </p:spPr>
+        <p:txBody>
+          <a:bodyPr/>
+          <a:p/>
+        </p:txBody>
       </p:sp>
       <p:sp>
         <p:nvSpPr>
@@ -5581,6 +5601,10 @@
           </a:solidFill>
           <a:ln/>
         </p:spPr>
+        <p:txBody>
+          <a:bodyPr/>
+          <a:p/>
+        </p:txBody>
       </p:sp>
       <p:sp>
         <p:nvSpPr>
@@ -6173,6 +6197,10 @@
           </a:solidFill>
           <a:ln/>
         </p:spPr>
+        <p:txBody>
+          <a:bodyPr/>
+          <a:p/>
+        </p:txBody>
       </p:sp>
       <p:sp>
         <p:nvSpPr>
@@ -6776,6 +6804,10 @@
           </a:solidFill>
           <a:ln/>
         </p:spPr>
+        <p:txBody>
+          <a:bodyPr/>
+          <a:p/>
+        </p:txBody>
       </p:sp>
       <p:sp>
         <p:nvSpPr>
@@ -7239,7 +7271,7 @@
                 <a:ea typeface="Calibri" pitchFamily="34" charset="-122"/>
                 <a:cs typeface="Calibri" pitchFamily="34" charset="-120"/>
               </a:rPr>
-              <a:t>www.proxiant.com</a:t>
+              <a:t>proxiant.ai</a:t>
             </a:r>
             <a:endParaRPr lang="en-US" sz="1800" dirty="0"/>
           </a:p>
@@ -7328,6 +7360,10 @@
           </a:solidFill>
           <a:ln/>
         </p:spPr>
+        <p:txBody>
+          <a:bodyPr/>
+          <a:p/>
+        </p:txBody>
       </p:sp>
       <p:sp>
         <p:nvSpPr>
@@ -7731,6 +7767,10 @@
           </a:solidFill>
           <a:ln/>
         </p:spPr>
+        <p:txBody>
+          <a:bodyPr/>
+          <a:p/>
+        </p:txBody>
       </p:sp>
       <p:sp>
         <p:nvSpPr>
@@ -8243,6 +8283,10 @@
           </a:solidFill>
           <a:ln/>
         </p:spPr>
+        <p:txBody>
+          <a:bodyPr/>
+          <a:p/>
+        </p:txBody>
       </p:sp>
       <p:sp>
         <p:nvSpPr>
@@ -8795,6 +8839,10 @@
           </a:solidFill>
           <a:ln/>
         </p:spPr>
+        <p:txBody>
+          <a:bodyPr/>
+          <a:p/>
+        </p:txBody>
       </p:sp>
       <p:sp>
         <p:nvSpPr>
@@ -9336,6 +9384,10 @@
           </a:solidFill>
           <a:ln/>
         </p:spPr>
+        <p:txBody>
+          <a:bodyPr/>
+          <a:p/>
+        </p:txBody>
       </p:sp>
       <p:sp>
         <p:nvSpPr>
@@ -9848,6 +9900,10 @@
           </a:solidFill>
           <a:ln/>
         </p:spPr>
+        <p:txBody>
+          <a:bodyPr/>
+          <a:p/>
+        </p:txBody>
       </p:sp>
       <p:sp>
         <p:nvSpPr>
@@ -10338,6 +10394,10 @@
           </a:solidFill>
           <a:ln/>
         </p:spPr>
+        <p:txBody>
+          <a:bodyPr/>
+          <a:p/>
+        </p:txBody>
       </p:sp>
       <p:sp>
         <p:nvSpPr>
@@ -10948,6 +11008,10 @@
           </a:solidFill>
           <a:ln/>
         </p:spPr>
+        <p:txBody>
+          <a:bodyPr/>
+          <a:p/>
+        </p:txBody>
       </p:sp>
       <p:sp>
         <p:nvSpPr>
